--- a/media/exports/reports/2026-10/overtime.pptx
+++ b/media/exports/reports/2026-10/overtime.pptx
@@ -244,76 +244,76 @@
                 <c:formatCode>0.0"%";[Red](0.0"%")</c:formatCode>
                 <c:ptCount val="24"/>
                 <c:pt idx="0">
-                  <c:v>1.3</c:v>
+                  <c:v>2.7</c:v>
                 </c:pt>
                 <c:pt idx="1">
-                  <c:v>1.9</c:v>
+                  <c:v>2.2</c:v>
                 </c:pt>
                 <c:pt idx="2">
-                  <c:v>2.3</c:v>
+                  <c:v>3.0</c:v>
                 </c:pt>
                 <c:pt idx="3">
-                  <c:v>2.8</c:v>
+                  <c:v>4.6</c:v>
                 </c:pt>
                 <c:pt idx="4">
-                  <c:v>2.4</c:v>
+                  <c:v>4.4</c:v>
                 </c:pt>
                 <c:pt idx="5">
                   <c:v>3.6</c:v>
                 </c:pt>
                 <c:pt idx="6">
-                  <c:v>2.6</c:v>
+                  <c:v>3.7</c:v>
                 </c:pt>
                 <c:pt idx="7">
                   <c:v>2.8</c:v>
                 </c:pt>
                 <c:pt idx="8">
-                  <c:v>2.4</c:v>
+                  <c:v>3.3</c:v>
                 </c:pt>
                 <c:pt idx="9">
-                  <c:v>4.6</c:v>
+                  <c:v>3.3</c:v>
                 </c:pt>
                 <c:pt idx="10">
-                  <c:v>3.0</c:v>
+                  <c:v>3.7</c:v>
                 </c:pt>
                 <c:pt idx="11">
-                  <c:v>4.0</c:v>
+                  <c:v>3.9</c:v>
                 </c:pt>
                 <c:pt idx="12">
-                  <c:v>3.9</c:v>
+                  <c:v>3.8</c:v>
                 </c:pt>
                 <c:pt idx="13">
-                  <c:v>3.5</c:v>
+                  <c:v>7.7</c:v>
                 </c:pt>
                 <c:pt idx="14">
-                  <c:v>3.8</c:v>
+                  <c:v>3.1</c:v>
                 </c:pt>
                 <c:pt idx="15">
+                  <c:v>4.2</c:v>
+                </c:pt>
+                <c:pt idx="16">
+                  <c:v>4.2</c:v>
+                </c:pt>
+                <c:pt idx="17">
+                  <c:v>5.9</c:v>
+                </c:pt>
+                <c:pt idx="18">
+                  <c:v>6.7</c:v>
+                </c:pt>
+                <c:pt idx="19">
+                  <c:v>7.2</c:v>
+                </c:pt>
+                <c:pt idx="20">
+                  <c:v>4.9</c:v>
+                </c:pt>
+                <c:pt idx="21">
+                  <c:v>5.6</c:v>
+                </c:pt>
+                <c:pt idx="22">
                   <c:v>5.8</c:v>
                 </c:pt>
-                <c:pt idx="16">
-                  <c:v>5.6</c:v>
-                </c:pt>
-                <c:pt idx="17">
-                  <c:v>5.8</c:v>
-                </c:pt>
-                <c:pt idx="18">
-                  <c:v>6.5</c:v>
-                </c:pt>
-                <c:pt idx="19">
-                  <c:v>5.4</c:v>
-                </c:pt>
-                <c:pt idx="20">
-                  <c:v>6.2</c:v>
-                </c:pt>
-                <c:pt idx="21">
-                  <c:v>5.2</c:v>
-                </c:pt>
-                <c:pt idx="22">
-                  <c:v>6.2</c:v>
-                </c:pt>
                 <c:pt idx="23">
-                  <c:v>11.7</c:v>
+                  <c:v>8.1</c:v>
                 </c:pt>
               </c:numCache>
             </c:numRef>
@@ -362,7 +362,7 @@
         <c:axId val="-2100718248"/>
         <c:scaling>
           <c:orientation val="minMax"/>
-          <c:max val="12.5"/>
+          <c:max val="10.0"/>
           <c:min val="0.0"/>
         </c:scaling>
         <c:delete val="0"/>
@@ -397,7 +397,7 @@
         <c:crossAx val="-2101159928"/>
         <c:crosses val="autoZero"/>
         <c:crossBetween val="midCat"/>
-        <c:majorUnit val="2.5"/>
+        <c:majorUnit val="2.0"/>
       </c:valAx>
     </c:plotArea>
     <c:plotVisOnly val="1"/>
@@ -486,13 +486,13 @@
               <c:strCache>
                 <c:ptCount val="3"/>
                 <c:pt idx="0">
-                  <c:v>Paperwork and quotes</c:v>
+                  <c:v>After-hours call-out</c:v>
                 </c:pt>
                 <c:pt idx="1">
-                  <c:v>Installation ran over</c:v>
+                  <c:v>Short-staffed</c:v>
                 </c:pt>
                 <c:pt idx="2">
-                  <c:v>After-hours call-out</c:v>
+                  <c:v>Installation ran over</c:v>
                 </c:pt>
               </c:strCache>
             </c:strRef>
@@ -504,13 +504,13 @@
                 <c:formatCode>#,##0;[Red](#,##0)</c:formatCode>
                 <c:ptCount val="3"/>
                 <c:pt idx="0">
-                  <c:v>1.0</c:v>
+                  <c:v>2.0</c:v>
                 </c:pt>
                 <c:pt idx="1">
-                  <c:v>5.0</c:v>
+                  <c:v>2.0</c:v>
                 </c:pt>
                 <c:pt idx="2">
-                  <c:v>6.5</c:v>
+                  <c:v>4.0</c:v>
                 </c:pt>
               </c:numCache>
             </c:numRef>
@@ -574,7 +574,7 @@
       <c:valAx>
         <c:axId val="-2113994440"/>
         <c:scaling>
-          <c:max val="7.475"/>
+          <c:max val="4.6"/>
           <c:min val="0.0"/>
         </c:scaling>
         <c:delete/>
@@ -664,40 +664,18 @@
               </a:solidFill>
             </c:spPr>
           </c:dPt>
-          <c:dPt>
-            <c:idx val="3"/>
-            <c:spPr>
-              <a:solidFill>
-                <a:srgbClr val="0E9F6E"/>
-              </a:solidFill>
-            </c:spPr>
-          </c:dPt>
-          <c:dPt>
-            <c:idx val="4"/>
-            <c:spPr>
-              <a:solidFill>
-                <a:srgbClr val="0E9F6E"/>
-              </a:solidFill>
-            </c:spPr>
-          </c:dPt>
           <c:cat>
             <c:strRef>
-              <c:f>Sheet1!$A$2:$A$6</c:f>
+              <c:f>Sheet1!$A$2:$A$4</c:f>
               <c:strCache>
-                <c:ptCount val="5"/>
+                <c:ptCount val="3"/>
                 <c:pt idx="0">
-                  <c:v>Technician T3</c:v>
+                  <c:v>Technician T6</c:v>
                 </c:pt>
                 <c:pt idx="1">
-                  <c:v>Technician T1</c:v>
+                  <c:v>Technician T4</c:v>
                 </c:pt>
                 <c:pt idx="2">
-                  <c:v>Technician T7</c:v>
-                </c:pt>
-                <c:pt idx="3">
-                  <c:v>Technician T4</c:v>
-                </c:pt>
-                <c:pt idx="4">
                   <c:v>Technician T5</c:v>
                 </c:pt>
               </c:strCache>
@@ -705,24 +683,18 @@
           </c:cat>
           <c:val>
             <c:numRef>
-              <c:f>Sheet1!$B$2:$B$6</c:f>
+              <c:f>Sheet1!$B$2:$B$4</c:f>
               <c:numCache>
                 <c:formatCode>#,##0;[Red](#,##0)</c:formatCode>
-                <c:ptCount val="5"/>
+                <c:ptCount val="3"/>
                 <c:pt idx="0">
-                  <c:v>1.5</c:v>
+                  <c:v>2.0</c:v>
                 </c:pt>
                 <c:pt idx="1">
-                  <c:v>2.0</c:v>
+                  <c:v>2.5</c:v>
                 </c:pt>
                 <c:pt idx="2">
-                  <c:v>2.0</c:v>
-                </c:pt>
-                <c:pt idx="3">
-                  <c:v>2.5</c:v>
-                </c:pt>
-                <c:pt idx="4">
-                  <c:v>4.5</c:v>
+                  <c:v>3.5</c:v>
                 </c:pt>
               </c:numCache>
             </c:numRef>
@@ -786,7 +758,7 @@
       <c:valAx>
         <c:axId val="-2113994440"/>
         <c:scaling>
-          <c:max val="5.175"/>
+          <c:max val="4.0249999999999995"/>
           <c:min val="0.0"/>
         </c:scaling>
         <c:delete/>
@@ -1283,7 +1255,7 @@
           <a:lstStyle/>
           <a:p>
             <a:r>
-              <a:t>Where is overtime creeping up, and why?. Overtime, October so far: 11.7%; Overtime hours, October so far: 12.5 h; October last year: 4.0%. Technicians worked 12.5 h of overtime in October so far, 11.7% of ordinary hours (target under 5.0%), against 6.2% in September. Over the last year it has gone from 4.0% to 11.7%. After-hours call-out is the main reason: 6.5 h, 52.0% of the overtime. Technician T5 carried the most (4.5 h). Above target by 7.2 h.</a:t>
+              <a:t>Where is overtime creeping up, and why?. Overtime, October so far: 8.1%; Overtime hours, October so far: 8.0 h; October last year: 3.9%. Technicians worked 8.0 h of overtime in October so far, 8.1% of ordinary hours (target under 5.0%), against 5.8% in September. Over the last year it has gone from 3.9% to 8.1%. Installation ran over is the main reason: 4.0 h, 50.0% of the overtime. Technician T5 carried the most (3.5 h). Above target by 3.1 h.</a:t>
             </a:r>
           </a:p>
         </p:txBody>
@@ -4822,7 +4794,7 @@
                 </a:solidFill>
                 <a:latin typeface="Roboto"/>
               </a:rPr>
-              <a:t>Data retrieved 2pm, Tue 6 Oct 2026 · Generated 8 Oct 2026, 6:29pm · Sample data · Made with Python (python-pptx)</a:t>
+              <a:t>Data retrieved 2pm, Tue 6 Oct 2026 · Generated 8 Oct 2026, 11:41pm · Sample data · Made with Python (python-pptx)</a:t>
             </a:r>
           </a:p>
         </p:txBody>
@@ -5168,7 +5140,7 @@
                 </a:solidFill>
                 <a:latin typeface="Roboto"/>
               </a:rPr>
-              <a:t>11.7%</a:t>
+              <a:t>8.1%</a:t>
             </a:r>
           </a:p>
         </p:txBody>
@@ -5334,7 +5306,7 @@
                 </a:solidFill>
                 <a:latin typeface="Roboto"/>
               </a:rPr>
-              <a:t>12.5 h</a:t>
+              <a:t>8.0 h</a:t>
             </a:r>
           </a:p>
         </p:txBody>
@@ -5373,7 +5345,7 @@
                 </a:solidFill>
                 <a:latin typeface="Roboto"/>
               </a:rPr>
-              <a:t>September 71.0 h</a:t>
+              <a:t>September 64.5 h</a:t>
             </a:r>
           </a:p>
         </p:txBody>
@@ -5500,7 +5472,7 @@
                 </a:solidFill>
                 <a:latin typeface="Roboto"/>
               </a:rPr>
-              <a:t>4.0%</a:t>
+              <a:t>3.9%</a:t>
             </a:r>
           </a:p>
         </p:txBody>
@@ -5539,7 +5511,7 @@
                 </a:solidFill>
                 <a:latin typeface="Roboto"/>
               </a:rPr>
-              <a:t>46.0 h of overtime</a:t>
+              <a:t>38.0 h of overtime</a:t>
             </a:r>
           </a:p>
         </p:txBody>
@@ -5684,7 +5656,7 @@
                 </a:solidFill>
                 <a:latin typeface="Roboto"/>
               </a:rPr>
-              <a:t>Technicians worked 12.5 h of overtime in October so far, 11.7% of ordinary hours (target under 5.0%), against 6.2% in September. Over the last year it has gone from 4.0% to 11.7%.</a:t>
+              <a:t>Technicians worked 8.0 h of overtime in October so far, 8.1% of ordinary hours (target under 5.0%), against 5.8% in September. Over the last year it has gone from 3.9% to 8.1%.</a:t>
             </a:r>
           </a:p>
         </p:txBody>
@@ -5811,7 +5783,7 @@
                 </a:solidFill>
                 <a:latin typeface="Roboto"/>
               </a:rPr>
-              <a:t>After-hours call-out is the main reason: 6.5 h, 52.0% of the overtime. Technician T5 carried the most (4.5 h). Above target by 7.2 h.</a:t>
+              <a:t>Installation ran over is the main reason: 4.0 h, 50.0% of the overtime. Technician T5 carried the most (3.5 h). Above target by 3.1 h.</a:t>
             </a:r>
           </a:p>
         </p:txBody>
@@ -5889,7 +5861,7 @@
                 </a:solidFill>
                 <a:latin typeface="Roboto"/>
               </a:rPr>
-              <a:t>Data retrieved 2pm, Tue 6 Oct 2026 · Generated 8 Oct 2026, 6:29pm · Sample data · Made with Python (python-pptx)</a:t>
+              <a:t>Data retrieved 2pm, Tue 6 Oct 2026 · Generated 8 Oct 2026, 11:41pm · Sample data · Made with Python (python-pptx)</a:t>
             </a:r>
           </a:p>
         </p:txBody>
@@ -6204,7 +6176,7 @@
                 </a:solidFill>
                 <a:latin typeface="Roboto"/>
               </a:rPr>
-              <a:t>Data retrieved 2pm, Tue 6 Oct 2026 · Generated 8 Oct 2026, 6:29pm · Sample data · Made with Python (python-pptx)</a:t>
+              <a:t>Data retrieved 2pm, Tue 6 Oct 2026 · Generated 8 Oct 2026, 11:41pm · Sample data · Made with Python (python-pptx)</a:t>
             </a:r>
           </a:p>
         </p:txBody>
@@ -6519,7 +6491,7 @@
                 </a:solidFill>
                 <a:latin typeface="Roboto"/>
               </a:rPr>
-              <a:t>Data retrieved 2pm, Tue 6 Oct 2026 · Generated 8 Oct 2026, 6:29pm · Sample data · Made with Python (python-pptx)</a:t>
+              <a:t>Data retrieved 2pm, Tue 6 Oct 2026 · Generated 8 Oct 2026, 11:41pm · Sample data · Made with Python (python-pptx)</a:t>
             </a:r>
           </a:p>
         </p:txBody>

--- a/media/exports/reports/2026-10/overtime.pptx
+++ b/media/exports/reports/2026-10/overtime.pptx
@@ -1185,7 +1185,7 @@
           <a:lstStyle/>
           <a:p>
             <a:r>
-              <a:t>Where is overtime creeping up, and why?. Sample Electrical &amp; Air Pty Ltd. Period: October 2026 to date. Each technician's paid hours, day by day: ordinary hours and overtime, with the main reason for the overtime.</a:t>
+              <a:t>Where is overtime creeping up, and why?. Sample Electrical &amp; Air Pty Ltd. Period: October 2026 to date. In short: Overtime was 8.1% of ordinary hours in October so far (target under 5.0%), up from 3.9% a year earlier. Each technician's paid hours, day by day: ordinary hours and overtime, with the main reason for the overtime.</a:t>
             </a:r>
           </a:p>
         </p:txBody>
@@ -4620,7 +4620,7 @@
         <p:spPr>
           <a:xfrm>
             <a:off x="457200" y="3703320"/>
-            <a:ext cx="11277295" cy="535940"/>
+            <a:ext cx="11277295" cy="758190"/>
           </a:xfrm>
           <a:prstGeom prst="rect">
             <a:avLst/>
@@ -4645,7 +4645,7 @@
                 </a:solidFill>
                 <a:latin typeface="Roboto"/>
               </a:rPr>
-              <a:t>Period: October 2026 to date. Each technician's paid hours, day by day: ordinary hours and overtime, with the main reason for the overtime.</a:t>
+              <a:t>Period: October 2026 to date. In short: Overtime was 8.1% of ordinary hours in October so far (target under 5.0%), up from 3.9% a year earlier. Each technician's paid hours, day by day: ordinary hours and overtime, with the main reason for the overtime.</a:t>
             </a:r>
           </a:p>
         </p:txBody>
@@ -4658,7 +4658,7 @@
         </p:nvSpPr>
         <p:spPr>
           <a:xfrm>
-            <a:off x="457200" y="4330700"/>
+            <a:off x="457200" y="4552950"/>
             <a:ext cx="11277295" cy="1097280"/>
           </a:xfrm>
           <a:prstGeom prst="rect">
@@ -4794,7 +4794,7 @@
                 </a:solidFill>
                 <a:latin typeface="Roboto"/>
               </a:rPr>
-              <a:t>Data retrieved 2pm, Tue 6 Oct 2026 · Generated 8 Oct 2026, 11:41pm · Sample data · Made with Python (python-pptx)</a:t>
+              <a:t>Data retrieved 2pm, Tue 6 Oct 2026 · Generated 10 Oct 2026, 9:55pm · Sample data · Made with Python (python-pptx)</a:t>
             </a:r>
           </a:p>
         </p:txBody>
@@ -5861,7 +5861,7 @@
                 </a:solidFill>
                 <a:latin typeface="Roboto"/>
               </a:rPr>
-              <a:t>Data retrieved 2pm, Tue 6 Oct 2026 · Generated 8 Oct 2026, 11:41pm · Sample data · Made with Python (python-pptx)</a:t>
+              <a:t>Data retrieved 2pm, Tue 6 Oct 2026 · Generated 10 Oct 2026, 9:55pm · Sample data · Made with Python (python-pptx)</a:t>
             </a:r>
           </a:p>
         </p:txBody>
@@ -6176,7 +6176,7 @@
                 </a:solidFill>
                 <a:latin typeface="Roboto"/>
               </a:rPr>
-              <a:t>Data retrieved 2pm, Tue 6 Oct 2026 · Generated 8 Oct 2026, 11:41pm · Sample data · Made with Python (python-pptx)</a:t>
+              <a:t>Data retrieved 2pm, Tue 6 Oct 2026 · Generated 10 Oct 2026, 9:55pm · Sample data · Made with Python (python-pptx)</a:t>
             </a:r>
           </a:p>
         </p:txBody>
@@ -6491,7 +6491,7 @@
                 </a:solidFill>
                 <a:latin typeface="Roboto"/>
               </a:rPr>
-              <a:t>Data retrieved 2pm, Tue 6 Oct 2026 · Generated 8 Oct 2026, 11:41pm · Sample data · Made with Python (python-pptx)</a:t>
+              <a:t>Data retrieved 2pm, Tue 6 Oct 2026 · Generated 10 Oct 2026, 9:55pm · Sample data · Made with Python (python-pptx)</a:t>
             </a:r>
           </a:p>
         </p:txBody>
